--- a/classes/parte-10-seguridad-en-la-nube-y-contenedores/235-respuesta-a-incidentes-en-la-nube/clase-235-presentacion.pptx
+++ b/classes/parte-10-seguridad-en-la-nube-y-contenedores/235-respuesta-a-incidentes-en-la-nube/clase-235-presentacion.pptx
@@ -17,6 +17,10 @@
     <p:sldId id="265" r:id="rId16"/>
     <p:sldId id="266" r:id="rId17"/>
     <p:sldId id="267" r:id="rId18"/>
+    <p:sldId id="268" r:id="rId19"/>
+    <p:sldId id="269" r:id="rId20"/>
+    <p:sldId id="270" r:id="rId21"/>
+    <p:sldId id="271" r:id="rId22"/>
   </p:sldIdLst>
   <p:sldSz cx="9144000" cy="6858000" type="screen4x3"/>
   <p:notesSz cx="6858000" cy="9144000"/>
@@ -3198,7 +3202,7 @@
                   <a:srgbClr val="0B3D2E"/>
                 </a:solidFill>
               </a:rPr>
-              <a:t>⚠️ Errores comunes</a:t>
+              <a:t>🧪 Laboratorio guiado</a:t>
             </a:r>
           </a:p>
         </p:txBody>
@@ -3236,67 +3240,97 @@
                   <a:srgbClr val="22282E"/>
                 </a:solidFill>
               </a:rPr>
-              <a:t>•  Se apagó la instancia y se perdió la memoria — Contención destructiva prematura; aísla por red antes de apagar.</a:t>
-            </a:r>
-          </a:p>
-          <a:p>
-            <a:pPr>
-              <a:spcAft>
-                <a:spcPts val="600"/>
-              </a:spcAft>
-            </a:pPr>
-            <a:r>
-              <a:rPr sz="1500">
-                <a:solidFill>
-                  <a:srgbClr val="22282E"/>
-                </a:solidFill>
-              </a:rPr>
-              <a:t>•  El atacante volvió tras rotar una clave — Quedó persistencia (otro usuario/rol/función); erradica antes de recuperar.</a:t>
-            </a:r>
-          </a:p>
-          <a:p>
-            <a:pPr>
-              <a:spcAft>
-                <a:spcPts val="600"/>
-              </a:spcAft>
-            </a:pPr>
-            <a:r>
-              <a:rPr sz="1500">
-                <a:solidFill>
-                  <a:srgbClr val="22282E"/>
-                </a:solidFill>
-              </a:rPr>
-              <a:t>•  Evidencia alterada o no admisible — Se trabajó sobre el original; adquiere snapshots y mantén cadena de custodia.</a:t>
-            </a:r>
-          </a:p>
-          <a:p>
-            <a:pPr>
-              <a:spcAft>
-                <a:spcPts val="600"/>
-              </a:spcAft>
-            </a:pPr>
-            <a:r>
-              <a:rPr sz="1500">
-                <a:solidFill>
-                  <a:srgbClr val="22282E"/>
-                </a:solidFill>
-              </a:rPr>
-              <a:t>•  Rotación incompleta de secretos — Solo se rotó el secreto obvio; rota todos los que la identidad pudo tocar.</a:t>
-            </a:r>
-          </a:p>
-          <a:p>
-            <a:pPr>
-              <a:spcAft>
-                <a:spcPts val="600"/>
-              </a:spcAft>
-            </a:pPr>
-            <a:r>
-              <a:rPr sz="1500">
-                <a:solidFill>
-                  <a:srgbClr val="22282E"/>
-                </a:solidFill>
-              </a:rPr>
-              <a:t>•  Reconstrucción trae de vuelta el problema — Se reconstruyó desde IaC vulnerable; corrige el código antes de aplicar.</a:t>
+              <a:t>•  Preparación: define un rol de "responder" con permisos mínimos para aislar y adquirir; crea el runbook y una cuenta/bucket de evidencia.</a:t>
+            </a:r>
+          </a:p>
+          <a:p>
+            <a:pPr>
+              <a:spcAft>
+                <a:spcPts val="600"/>
+              </a:spcAft>
+            </a:pPr>
+            <a:r>
+              <a:rPr sz="1500">
+                <a:solidFill>
+                  <a:srgbClr val="22282E"/>
+                </a:solidFill>
+              </a:rPr>
+              <a:t>•  Detección/análisis: parte de una alerta de la clase 234 (p. ej. creación anómala de clave de acceso). Reconstruye el "quién/qué/cuándo" con los logs del plano de gestión.</a:t>
+            </a:r>
+          </a:p>
+          <a:p>
+            <a:pPr>
+              <a:spcAft>
+                <a:spcPts val="600"/>
+              </a:spcAft>
+            </a:pPr>
+            <a:r>
+              <a:rPr sz="1500">
+                <a:solidFill>
+                  <a:srgbClr val="22282E"/>
+                </a:solidFill>
+              </a:rPr>
+              <a:t>•  Contención de identidad: deshabilita la clave comprometida, revoca las sesiones activas (invalidar tokens) y aplica una policy de deny explícito al principal afectado. No lo borres aún (evidencia).</a:t>
+            </a:r>
+          </a:p>
+          <a:p>
+            <a:pPr>
+              <a:spcAft>
+                <a:spcPts val="600"/>
+              </a:spcAft>
+            </a:pPr>
+            <a:r>
+              <a:rPr sz="1500">
+                <a:solidFill>
+                  <a:srgbClr val="22282E"/>
+                </a:solidFill>
+              </a:rPr>
+              <a:t>•  Aislamiento del recurso: para una instancia comprometida, cambia su security group a uno sin reglas (cuarentena) en lugar de apagarla, para preservar la memoria y las conexiones.</a:t>
+            </a:r>
+          </a:p>
+          <a:p>
+            <a:pPr>
+              <a:spcAft>
+                <a:spcPts val="600"/>
+              </a:spcAft>
+            </a:pPr>
+            <a:r>
+              <a:rPr sz="1500">
+                <a:solidFill>
+                  <a:srgbClr val="22282E"/>
+                </a:solidFill>
+              </a:rPr>
+              <a:t>•  Adquisición: crea un snapshot del volumen, exporta los logs relevantes y guarda metadatos (etiquetas, IAM, red) en el bucket de evidencia inmutable.</a:t>
+            </a:r>
+          </a:p>
+          <a:p>
+            <a:pPr>
+              <a:spcAft>
+                <a:spcPts val="600"/>
+              </a:spcAft>
+            </a:pPr>
+            <a:r>
+              <a:rPr sz="1500">
+                <a:solidFill>
+                  <a:srgbClr val="22282E"/>
+                </a:solidFill>
+              </a:rPr>
+              <a:t>•  Erradicación: identifica y elimina persistencia (usuarios/roles nuevos, claves, reglas, funciones backdoor). Verifica con los logs que no queda actividad del atacante.</a:t>
+            </a:r>
+          </a:p>
+          <a:p>
+            <a:pPr>
+              <a:spcAft>
+                <a:spcPts val="600"/>
+              </a:spcAft>
+            </a:pPr>
+            <a:r>
+              <a:rPr sz="1500">
+                <a:solidFill>
+                  <a:srgbClr val="22282E"/>
+                </a:solidFill>
+              </a:rPr>
+              <a:t>•  Recuperación: reconstruye desde Terraform revisado, valida estado efectivo y rota o revoca credenciales cuya exposición esté respaldada por el alcance y las dependencias.</a:t>
             </a:r>
           </a:p>
         </p:txBody>
@@ -3347,7 +3381,7 @@
                   <a:srgbClr val="0B3D2E"/>
                 </a:solidFill>
               </a:rPr>
-              <a:t>❓ Preguntas frecuentes</a:t>
+              <a:t>✍️ Ejercicios</a:t>
             </a:r>
           </a:p>
         </p:txBody>
@@ -3385,82 +3419,82 @@
                   <a:srgbClr val="22282E"/>
                 </a:solidFill>
               </a:rPr>
-              <a:t>•  ❓ ¿Por qué aislar por red en vez de apagar una instancia comprometida?</a:t>
-            </a:r>
-          </a:p>
-          <a:p>
-            <a:pPr>
-              <a:spcAft>
-                <a:spcPts val="600"/>
-              </a:spcAft>
-            </a:pPr>
-            <a:r>
-              <a:rPr sz="1500">
-                <a:solidFill>
-                  <a:srgbClr val="22282E"/>
-                </a:solidFill>
-              </a:rPr>
-              <a:t>•  Apagarla destruye la memoria volátil y las conexiones activas, evidencia valiosa. Aislarla (security group sin tráfico) la neutraliza conservando el estado para el análisis forense.</a:t>
-            </a:r>
-          </a:p>
-          <a:p>
-            <a:pPr>
-              <a:spcAft>
-                <a:spcPts val="600"/>
-              </a:spcAft>
-            </a:pPr>
-            <a:r>
-              <a:rPr sz="1500">
-                <a:solidFill>
-                  <a:srgbClr val="22282E"/>
-                </a:solidFill>
-              </a:rPr>
-              <a:t>•  ❓ ¿Qué se contiene primero en la nube, la identidad o el recurso?</a:t>
-            </a:r>
-          </a:p>
-          <a:p>
-            <a:pPr>
-              <a:spcAft>
-                <a:spcPts val="600"/>
-              </a:spcAft>
-            </a:pPr>
-            <a:r>
-              <a:rPr sz="1500">
-                <a:solidFill>
-                  <a:srgbClr val="22282E"/>
-                </a:solidFill>
-              </a:rPr>
-              <a:t>•  Normalmente la identidad: deshabilitar la credencial comprometida y revocar sesiones corta el acceso del atacante de inmediato, incluso a recursos que aún no sabes que tocó. Luego se aísla el recurso concreto.</a:t>
-            </a:r>
-          </a:p>
-          <a:p>
-            <a:pPr>
-              <a:spcAft>
-                <a:spcPts val="600"/>
-              </a:spcAft>
-            </a:pPr>
-            <a:r>
-              <a:rPr sz="1500">
-                <a:solidFill>
-                  <a:srgbClr val="22282E"/>
-                </a:solidFill>
-              </a:rPr>
-              <a:t>•  ❓ ¿Por qué reconstruir con IaC en lugar de "limpiar" el recurso?</a:t>
-            </a:r>
-          </a:p>
-          <a:p>
-            <a:pPr>
-              <a:spcAft>
-                <a:spcPts val="600"/>
-              </a:spcAft>
-            </a:pPr>
-            <a:r>
-              <a:rPr sz="1500">
-                <a:solidFill>
-                  <a:srgbClr val="22282E"/>
-                </a:solidFill>
-              </a:rPr>
-              <a:t>•  Porque nunca tienes plena certeza de haber eliminado toda la persistencia de un sistema comprometido. Reconstruir desde código confiable garantiza un estado limpio, reproducible y auditable.</a:t>
+              <a:t>•  Escribe el runbook de "credencial IAM comprometida" con pasos y comandos.</a:t>
+            </a:r>
+          </a:p>
+          <a:p>
+            <a:pPr>
+              <a:spcAft>
+                <a:spcPts val="600"/>
+              </a:spcAft>
+            </a:pPr>
+            <a:r>
+              <a:rPr sz="1500">
+                <a:solidFill>
+                  <a:srgbClr val="22282E"/>
+                </a:solidFill>
+              </a:rPr>
+              <a:t>•  Diseña el procedimiento de cuarentena de una instancia sin destruir evidencia.</a:t>
+            </a:r>
+          </a:p>
+          <a:p>
+            <a:pPr>
+              <a:spcAft>
+                <a:spcPts val="600"/>
+              </a:spcAft>
+            </a:pPr>
+            <a:r>
+              <a:rPr sz="1500">
+                <a:solidFill>
+                  <a:srgbClr val="22282E"/>
+                </a:solidFill>
+              </a:rPr>
+              <a:t>•  Automatiza con Cloud Custodian el aislamiento de un recurso etiquetado como comprometido.</a:t>
+            </a:r>
+          </a:p>
+          <a:p>
+            <a:pPr>
+              <a:spcAft>
+                <a:spcPts val="600"/>
+              </a:spcAft>
+            </a:pPr>
+            <a:r>
+              <a:rPr sz="1500">
+                <a:solidFill>
+                  <a:srgbClr val="22282E"/>
+                </a:solidFill>
+              </a:rPr>
+              <a:t>•  Redacta el procedimiento de adquisición de snapshots y cadena de custodia.</a:t>
+            </a:r>
+          </a:p>
+          <a:p>
+            <a:pPr>
+              <a:spcAft>
+                <a:spcPts val="600"/>
+              </a:spcAft>
+            </a:pPr>
+            <a:r>
+              <a:rPr sz="1500">
+                <a:solidFill>
+                  <a:srgbClr val="22282E"/>
+                </a:solidFill>
+              </a:rPr>
+              <a:t>•  Reconstruye un recurso desde IaC y verifica el estado limpio.</a:t>
+            </a:r>
+          </a:p>
+          <a:p>
+            <a:pPr>
+              <a:spcAft>
+                <a:spcPts val="600"/>
+              </a:spcAft>
+            </a:pPr>
+            <a:r>
+              <a:rPr sz="1500">
+                <a:solidFill>
+                  <a:srgbClr val="22282E"/>
+                </a:solidFill>
+              </a:rPr>
+              <a:t>•  Convierte una lección aprendida en una regla de detección nueva.</a:t>
             </a:r>
           </a:p>
         </p:txBody>
@@ -3511,7 +3545,7 @@
                   <a:srgbClr val="0B3D2E"/>
                 </a:solidFill>
               </a:rPr>
-              <a:t>🔗 Referencias</a:t>
+              <a:t>📝 Reto verificable</a:t>
             </a:r>
           </a:p>
         </p:txBody>
@@ -3549,71 +3583,638 @@
                   <a:srgbClr val="22282E"/>
                 </a:solidFill>
               </a:rPr>
-              <a:t>•  NIST SP 800-61 Rev. 2, Computer Security Incident Handling Guide. &lt;https://csrc.nist.gov/pubs/sp/800/61/r2/final&gt;</a:t>
-            </a:r>
-          </a:p>
-          <a:p>
-            <a:pPr>
-              <a:spcAft>
-                <a:spcPts val="600"/>
-              </a:spcAft>
-            </a:pPr>
-            <a:r>
-              <a:rPr sz="1500">
-                <a:solidFill>
-                  <a:srgbClr val="22282E"/>
-                </a:solidFill>
-              </a:rPr>
-              <a:t>•  AWS Security Incident Response Guide. &lt;https://docs.aws.amazon.com/security-ir/latest/userguide/welcome.html&gt;</a:t>
-            </a:r>
-          </a:p>
-          <a:p>
-            <a:pPr>
-              <a:spcAft>
-                <a:spcPts val="600"/>
-              </a:spcAft>
-            </a:pPr>
-            <a:r>
-              <a:rPr sz="1500">
-                <a:solidFill>
-                  <a:srgbClr val="22282E"/>
-                </a:solidFill>
-              </a:rPr>
-              <a:t>•  MITRE ATT&amp;CK — Cloud Matrix. &lt;https://attack.mitre.org/matrices/enterprise/cloud/&gt;</a:t>
-            </a:r>
-          </a:p>
-          <a:p>
-            <a:pPr>
-              <a:spcAft>
-                <a:spcPts val="600"/>
-              </a:spcAft>
-            </a:pPr>
-            <a:r>
-              <a:rPr sz="1500">
-                <a:solidFill>
-                  <a:srgbClr val="22282E"/>
-                </a:solidFill>
-              </a:rPr>
-              <a:t>•  Cloud Custodian. &lt;https://cloudcustodian.io/&gt;</a:t>
-            </a:r>
-          </a:p>
-          <a:p>
-            <a:pPr>
-              <a:spcAft>
-                <a:spcPts val="600"/>
-              </a:spcAft>
-            </a:pPr>
-            <a:r>
-              <a:rPr sz="1500">
-                <a:solidFill>
-                  <a:srgbClr val="22282E"/>
-                </a:solidFill>
-              </a:rPr>
-              <a:t>•  Microsoft — Incident response in the cloud. &lt;https://learn.microsoft.com/security/operations/incident-response-overview&gt;</a:t>
-            </a:r>
-          </a:p>
-        </p:txBody>
-      </p:sp>
+              <a:t>•  Ejecuta un playbook completo end-to-end para una credencial comprometida que lanzó una instancia</a:t>
+            </a:r>
+          </a:p>
+          <a:p>
+            <a:pPr>
+              <a:spcAft>
+                <a:spcPts val="600"/>
+              </a:spcAft>
+            </a:pPr>
+            <a:r>
+              <a:rPr sz="1500">
+                <a:solidFill>
+                  <a:srgbClr val="22282E"/>
+                </a:solidFill>
+              </a:rPr>
+              <a:t>•  maliciosa: detección, contención, aislamiento, adquisición, erradicación y recuperación con IaC.</a:t>
+            </a:r>
+          </a:p>
+          <a:p>
+            <a:pPr>
+              <a:spcAft>
+                <a:spcPts val="600"/>
+              </a:spcAft>
+            </a:pPr>
+            <a:r>
+              <a:rPr sz="1500">
+                <a:solidFill>
+                  <a:srgbClr val="22282E"/>
+                </a:solidFill>
+              </a:rPr>
+              <a:t>•  Criterio de aceptación: al final, la clave comprometida está deshabilitada y sus sesiones</a:t>
+            </a:r>
+          </a:p>
+          <a:p>
+            <a:pPr>
+              <a:spcAft>
+                <a:spcPts val="600"/>
+              </a:spcAft>
+            </a:pPr>
+            <a:r>
+              <a:rPr sz="1500">
+                <a:solidFill>
+                  <a:srgbClr val="22282E"/>
+                </a:solidFill>
+              </a:rPr>
+              <a:t>•  revocadas, existe un snapshot forense y evidencia preservada en almacén inmutable, no queda</a:t>
+            </a:r>
+          </a:p>
+          <a:p>
+            <a:pPr>
+              <a:spcAft>
+                <a:spcPts val="600"/>
+              </a:spcAft>
+            </a:pPr>
+            <a:r>
+              <a:rPr sz="1500">
+                <a:solidFill>
+                  <a:srgbClr val="22282E"/>
+                </a:solidFill>
+              </a:rPr>
+              <a:t>•  persistencia del atacante (verificado en logs), y el recurso afectado está reconstruido desde</a:t>
+            </a:r>
+          </a:p>
+          <a:p>
+            <a:pPr>
+              <a:spcAft>
+                <a:spcPts val="600"/>
+              </a:spcAft>
+            </a:pPr>
+            <a:r>
+              <a:rPr sz="1500">
+                <a:solidFill>
+                  <a:srgbClr val="22282E"/>
+                </a:solidFill>
+              </a:rPr>
+              <a:t>•  Terraform con secretos rotados. Todo queda documentado en un informe con línea de tiempo.</a:t>
+            </a:r>
+          </a:p>
+        </p:txBody>
+      </p:sp>
+    </p:spTree>
+  </p:cSld>
+  <p:clrMapOvr>
+    <a:masterClrMapping/>
+  </p:clrMapOvr>
+</p:sld>
+</file>
+
+<file path=ppt/slides/slide13.xml><?xml version="1.0" encoding="utf-8"?>
+<p:sld xmlns:a="http://schemas.openxmlformats.org/drawingml/2006/main" xmlns:p="http://schemas.openxmlformats.org/presentationml/2006/main" xmlns:r="http://schemas.openxmlformats.org/officeDocument/2006/relationships">
+  <p:cSld>
+    <p:spTree>
+      <p:nvGrpSpPr>
+        <p:cNvPr id="1" name=""/>
+        <p:cNvGrpSpPr/>
+        <p:nvPr/>
+      </p:nvGrpSpPr>
+      <p:grpSpPr/>
+      <p:sp>
+        <p:nvSpPr>
+          <p:cNvPr id="2" name="TextBox 1"/>
+          <p:cNvSpPr txBox="1"/>
+          <p:nvPr/>
+        </p:nvSpPr>
+        <p:spPr>
+          <a:xfrm>
+            <a:off x="457200" y="320040"/>
+            <a:ext cx="8229600" cy="822960"/>
+          </a:xfrm>
+          <a:prstGeom prst="rect">
+            <a:avLst/>
+          </a:prstGeom>
+          <a:noFill/>
+        </p:spPr>
+        <p:txBody>
+          <a:bodyPr wrap="square">
+            <a:spAutoFit/>
+          </a:bodyPr>
+          <a:lstStyle/>
+          <a:p>
+            <a:r>
+              <a:rPr sz="2600" b="1">
+                <a:solidFill>
+                  <a:srgbClr val="0B3D2E"/>
+                </a:solidFill>
+              </a:rPr>
+              <a:t>⚠️ Errores comunes</a:t>
+            </a:r>
+          </a:p>
+        </p:txBody>
+      </p:sp>
+      <p:sp>
+        <p:nvSpPr>
+          <p:cNvPr id="3" name="TextBox 2"/>
+          <p:cNvSpPr txBox="1"/>
+          <p:nvPr/>
+        </p:nvSpPr>
+        <p:spPr>
+          <a:xfrm>
+            <a:off x="457200" y="1280160"/>
+            <a:ext cx="8229600" cy="4937760"/>
+          </a:xfrm>
+          <a:prstGeom prst="rect">
+            <a:avLst/>
+          </a:prstGeom>
+          <a:noFill/>
+        </p:spPr>
+        <p:txBody>
+          <a:bodyPr wrap="square">
+            <a:spAutoFit/>
+          </a:bodyPr>
+          <a:lstStyle/>
+          <a:p>
+            <a:pPr>
+              <a:spcAft>
+                <a:spcPts val="600"/>
+              </a:spcAft>
+            </a:pPr>
+            <a:r>
+              <a:rPr sz="1500">
+                <a:solidFill>
+                  <a:srgbClr val="22282E"/>
+                </a:solidFill>
+              </a:rPr>
+              <a:t>•  Se apagó la instancia y se perdió la memoria — Contención destructiva prematura; aísla por red antes de apagar.</a:t>
+            </a:r>
+          </a:p>
+          <a:p>
+            <a:pPr>
+              <a:spcAft>
+                <a:spcPts val="600"/>
+              </a:spcAft>
+            </a:pPr>
+            <a:r>
+              <a:rPr sz="1500">
+                <a:solidFill>
+                  <a:srgbClr val="22282E"/>
+                </a:solidFill>
+              </a:rPr>
+              <a:t>•  El atacante volvió tras rotar una clave — Quedó persistencia (otro usuario/rol/función); erradica antes de recuperar.</a:t>
+            </a:r>
+          </a:p>
+          <a:p>
+            <a:pPr>
+              <a:spcAft>
+                <a:spcPts val="600"/>
+              </a:spcAft>
+            </a:pPr>
+            <a:r>
+              <a:rPr sz="1500">
+                <a:solidFill>
+                  <a:srgbClr val="22282E"/>
+                </a:solidFill>
+              </a:rPr>
+              <a:t>•  Evidencia sin trazabilidad suficiente — Faltan exportación original, identificadores, permisos o bitácora. Preserva respuestas, snapshots y cadena de custodia según el contexto.</a:t>
+            </a:r>
+          </a:p>
+          <a:p>
+            <a:pPr>
+              <a:spcAft>
+                <a:spcPts val="600"/>
+              </a:spcAft>
+            </a:pPr>
+            <a:r>
+              <a:rPr sz="1500">
+                <a:solidFill>
+                  <a:srgbClr val="22282E"/>
+                </a:solidFill>
+              </a:rPr>
+              <a:t>•  Rotación incompleta de credenciales — Solo se trató la credencial inicial. Reconstruye sesiones, roles y secretos accesibles y documenta el alcance usado para rotar o revocar.</a:t>
+            </a:r>
+          </a:p>
+          <a:p>
+            <a:pPr>
+              <a:spcAft>
+                <a:spcPts val="600"/>
+              </a:spcAft>
+            </a:pPr>
+            <a:r>
+              <a:rPr sz="1500">
+                <a:solidFill>
+                  <a:srgbClr val="22282E"/>
+                </a:solidFill>
+              </a:rPr>
+              <a:t>•  Reconstrucción trae de vuelta el problema — Se reconstruyó desde IaC vulnerable; corrige el código antes de aplicar.</a:t>
+            </a:r>
+          </a:p>
+        </p:txBody>
+      </p:sp>
+    </p:spTree>
+  </p:cSld>
+  <p:clrMapOvr>
+    <a:masterClrMapping/>
+  </p:clrMapOvr>
+</p:sld>
+</file>
+
+<file path=ppt/slides/slide14.xml><?xml version="1.0" encoding="utf-8"?>
+<p:sld xmlns:a="http://schemas.openxmlformats.org/drawingml/2006/main" xmlns:p="http://schemas.openxmlformats.org/presentationml/2006/main" xmlns:r="http://schemas.openxmlformats.org/officeDocument/2006/relationships">
+  <p:cSld>
+    <p:spTree>
+      <p:nvGrpSpPr>
+        <p:cNvPr id="1" name=""/>
+        <p:cNvGrpSpPr/>
+        <p:nvPr/>
+      </p:nvGrpSpPr>
+      <p:grpSpPr/>
+      <p:sp>
+        <p:nvSpPr>
+          <p:cNvPr id="2" name="TextBox 1"/>
+          <p:cNvSpPr txBox="1"/>
+          <p:nvPr/>
+        </p:nvSpPr>
+        <p:spPr>
+          <a:xfrm>
+            <a:off x="457200" y="320040"/>
+            <a:ext cx="8229600" cy="822960"/>
+          </a:xfrm>
+          <a:prstGeom prst="rect">
+            <a:avLst/>
+          </a:prstGeom>
+          <a:noFill/>
+        </p:spPr>
+        <p:txBody>
+          <a:bodyPr wrap="square">
+            <a:spAutoFit/>
+          </a:bodyPr>
+          <a:lstStyle/>
+          <a:p>
+            <a:r>
+              <a:rPr sz="2600" b="1">
+                <a:solidFill>
+                  <a:srgbClr val="0B3D2E"/>
+                </a:solidFill>
+              </a:rPr>
+              <a:t>❓ Preguntas frecuentes</a:t>
+            </a:r>
+          </a:p>
+        </p:txBody>
+      </p:sp>
+      <p:sp>
+        <p:nvSpPr>
+          <p:cNvPr id="3" name="TextBox 2"/>
+          <p:cNvSpPr txBox="1"/>
+          <p:nvPr/>
+        </p:nvSpPr>
+        <p:spPr>
+          <a:xfrm>
+            <a:off x="457200" y="1280160"/>
+            <a:ext cx="8229600" cy="4937760"/>
+          </a:xfrm>
+          <a:prstGeom prst="rect">
+            <a:avLst/>
+          </a:prstGeom>
+          <a:noFill/>
+        </p:spPr>
+        <p:txBody>
+          <a:bodyPr wrap="square">
+            <a:spAutoFit/>
+          </a:bodyPr>
+          <a:lstStyle/>
+          <a:p>
+            <a:pPr>
+              <a:spcAft>
+                <a:spcPts val="600"/>
+              </a:spcAft>
+            </a:pPr>
+            <a:r>
+              <a:rPr sz="1500">
+                <a:solidFill>
+                  <a:srgbClr val="22282E"/>
+                </a:solidFill>
+              </a:rPr>
+              <a:t>•  ❓ ¿Por qué aislar por red en vez de apagar una instancia comprometida?</a:t>
+            </a:r>
+          </a:p>
+          <a:p>
+            <a:pPr>
+              <a:spcAft>
+                <a:spcPts val="600"/>
+              </a:spcAft>
+            </a:pPr>
+            <a:r>
+              <a:rPr sz="1500">
+                <a:solidFill>
+                  <a:srgbClr val="22282E"/>
+                </a:solidFill>
+              </a:rPr>
+              <a:t>•  Apagarla destruye la memoria volátil y las conexiones activas, evidencia valiosa. Aislarla (security group sin tráfico) la neutraliza conservando el estado para el análisis forense.</a:t>
+            </a:r>
+          </a:p>
+          <a:p>
+            <a:pPr>
+              <a:spcAft>
+                <a:spcPts val="600"/>
+              </a:spcAft>
+            </a:pPr>
+            <a:r>
+              <a:rPr sz="1500">
+                <a:solidFill>
+                  <a:srgbClr val="22282E"/>
+                </a:solidFill>
+              </a:rPr>
+              <a:t>•  ❓ ¿Qué se contiene primero en la nube, la identidad o el recurso?</a:t>
+            </a:r>
+          </a:p>
+          <a:p>
+            <a:pPr>
+              <a:spcAft>
+                <a:spcPts val="600"/>
+              </a:spcAft>
+            </a:pPr>
+            <a:r>
+              <a:rPr sz="1500">
+                <a:solidFill>
+                  <a:srgbClr val="22282E"/>
+                </a:solidFill>
+              </a:rPr>
+              <a:t>•  Normalmente la identidad: deshabilitar la credencial comprometida y revocar sesiones corta el acceso del atacante de inmediato, incluso a recursos que aún no sabes que tocó. Luego se aísla el recurso…</a:t>
+            </a:r>
+          </a:p>
+          <a:p>
+            <a:pPr>
+              <a:spcAft>
+                <a:spcPts val="600"/>
+              </a:spcAft>
+            </a:pPr>
+            <a:r>
+              <a:rPr sz="1500">
+                <a:solidFill>
+                  <a:srgbClr val="22282E"/>
+                </a:solidFill>
+              </a:rPr>
+              <a:t>•  ❓ ¿Por qué reconstruir con IaC en lugar de "limpiar" el recurso?</a:t>
+            </a:r>
+          </a:p>
+          <a:p>
+            <a:pPr>
+              <a:spcAft>
+                <a:spcPts val="600"/>
+              </a:spcAft>
+            </a:pPr>
+            <a:r>
+              <a:rPr sz="1500">
+                <a:solidFill>
+                  <a:srgbClr val="22282E"/>
+                </a:solidFill>
+              </a:rPr>
+              <a:t>•  Porque una limpieza manual puede dejar condiciones desconocidas. Reconstruir desde código e imágenes revisados reduce incertidumbre y mejora reproducibilidad, pero no garantiza limpieza si IaC…</a:t>
+            </a:r>
+          </a:p>
+        </p:txBody>
+      </p:sp>
+    </p:spTree>
+  </p:cSld>
+  <p:clrMapOvr>
+    <a:masterClrMapping/>
+  </p:clrMapOvr>
+</p:sld>
+</file>
+
+<file path=ppt/slides/slide15.xml><?xml version="1.0" encoding="utf-8"?>
+<p:sld xmlns:a="http://schemas.openxmlformats.org/drawingml/2006/main" xmlns:p="http://schemas.openxmlformats.org/presentationml/2006/main" xmlns:r="http://schemas.openxmlformats.org/officeDocument/2006/relationships">
+  <p:cSld>
+    <p:spTree>
+      <p:nvGrpSpPr>
+        <p:cNvPr id="1" name=""/>
+        <p:cNvGrpSpPr/>
+        <p:nvPr/>
+      </p:nvGrpSpPr>
+      <p:grpSpPr/>
+      <p:sp>
+        <p:nvSpPr>
+          <p:cNvPr id="2" name="TextBox 1"/>
+          <p:cNvSpPr txBox="1"/>
+          <p:nvPr/>
+        </p:nvSpPr>
+        <p:spPr>
+          <a:xfrm>
+            <a:off x="457200" y="320040"/>
+            <a:ext cx="8229600" cy="822960"/>
+          </a:xfrm>
+          <a:prstGeom prst="rect">
+            <a:avLst/>
+          </a:prstGeom>
+          <a:noFill/>
+        </p:spPr>
+        <p:txBody>
+          <a:bodyPr wrap="square">
+            <a:spAutoFit/>
+          </a:bodyPr>
+          <a:lstStyle/>
+          <a:p>
+            <a:r>
+              <a:rPr sz="2600" b="1">
+                <a:solidFill>
+                  <a:srgbClr val="0B3D2E"/>
+                </a:solidFill>
+              </a:rPr>
+              <a:t>🔗 Referencias verificables y alcance</a:t>
+            </a:r>
+          </a:p>
+        </p:txBody>
+      </p:sp>
+      <p:sp>
+        <p:nvSpPr>
+          <p:cNvPr id="3" name="TextBox 2"/>
+          <p:cNvSpPr txBox="1"/>
+          <p:nvPr/>
+        </p:nvSpPr>
+        <p:spPr>
+          <a:xfrm>
+            <a:off x="457200" y="1280160"/>
+            <a:ext cx="8229600" cy="4937760"/>
+          </a:xfrm>
+          <a:prstGeom prst="rect">
+            <a:avLst/>
+          </a:prstGeom>
+          <a:noFill/>
+        </p:spPr>
+        <p:txBody>
+          <a:bodyPr wrap="square">
+            <a:spAutoFit/>
+          </a:bodyPr>
+          <a:lstStyle/>
+          <a:p>
+            <a:pPr>
+              <a:spcAft>
+                <a:spcPts val="600"/>
+              </a:spcAft>
+            </a:pPr>
+            <a:r>
+              <a:rPr sz="1500">
+                <a:solidFill>
+                  <a:srgbClr val="22282E"/>
+                </a:solidFill>
+              </a:rPr>
+              <a:t>•  NIST SP 800-61 Rev. 3. &lt;https://doi.org/10.6028/NIST.SP.800-61r3&gt; — marco vigente de respuesta integrado con CSF 2.0; reemplaza Rev. 2.</a:t>
+            </a:r>
+          </a:p>
+          <a:p>
+            <a:pPr>
+              <a:spcAft>
+                <a:spcPts val="600"/>
+              </a:spcAft>
+            </a:pPr>
+            <a:r>
+              <a:rPr sz="1500">
+                <a:solidFill>
+                  <a:srgbClr val="22282E"/>
+                </a:solidFill>
+              </a:rPr>
+              <a:t>•  NISTIR 8006. &lt;https://doi.org/10.6028/NIST.IR.8006&gt; — desafíos forenses propios de servicios cloud y dependencia del proveedor.</a:t>
+            </a:r>
+          </a:p>
+          <a:p>
+            <a:pPr>
+              <a:spcAft>
+                <a:spcPts val="600"/>
+              </a:spcAft>
+            </a:pPr>
+            <a:r>
+              <a:rPr sz="1500">
+                <a:solidFill>
+                  <a:srgbClr val="22282E"/>
+                </a:solidFill>
+              </a:rPr>
+              <a:t>•  AWS Security Incident Response Guide. &lt;https://docs.aws.amazon.com/security-ir/latest/userguide/welcome.html&gt; — procedimientos y capacidades oficiales AWS; adaptar a arquitectura y permisos.</a:t>
+            </a:r>
+          </a:p>
+          <a:p>
+            <a:pPr>
+              <a:spcAft>
+                <a:spcPts val="600"/>
+              </a:spcAft>
+            </a:pPr>
+            <a:r>
+              <a:rPr sz="1500">
+                <a:solidFill>
+                  <a:srgbClr val="22282E"/>
+                </a:solidFill>
+              </a:rPr>
+              <a:t>•  Microsoft Incident Response. &lt;https://learn.microsoft.com/security/operations/incident-response-overview&gt; — orientación oficial Microsoft para preparación y operación.</a:t>
+            </a:r>
+          </a:p>
+          <a:p>
+            <a:pPr>
+              <a:spcAft>
+                <a:spcPts val="600"/>
+              </a:spcAft>
+            </a:pPr>
+            <a:r>
+              <a:rPr sz="1500">
+                <a:solidFill>
+                  <a:srgbClr val="22282E"/>
+                </a:solidFill>
+              </a:rPr>
+              <a:t>•  MITRE ATT&amp;CK Cloud Matrix. &lt;https://attack.mitre.org/matrices/enterprise/cloud/&gt; — vocabulario para alcance y hunting, no procedimiento de contención.</a:t>
+            </a:r>
+          </a:p>
+          <a:p>
+            <a:pPr>
+              <a:spcAft>
+                <a:spcPts val="600"/>
+              </a:spcAft>
+            </a:pPr>
+            <a:r>
+              <a:rPr sz="1500">
+                <a:solidFill>
+                  <a:srgbClr val="22282E"/>
+                </a:solidFill>
+              </a:rPr>
+              <a:t>•  Cloud Custodian. &lt;https://cloudcustodian.io/&gt; — automatización policy-as-code; toda remediación debe probarse y autorizarse.</a:t>
+            </a:r>
+          </a:p>
+        </p:txBody>
+      </p:sp>
+    </p:spTree>
+  </p:cSld>
+  <p:clrMapOvr>
+    <a:masterClrMapping/>
+  </p:clrMapOvr>
+</p:sld>
+</file>
+
+<file path=ppt/slides/slide16.xml><?xml version="1.0" encoding="utf-8"?>
+<p:sld xmlns:a="http://schemas.openxmlformats.org/drawingml/2006/main" xmlns:p="http://schemas.openxmlformats.org/presentationml/2006/main" xmlns:r="http://schemas.openxmlformats.org/officeDocument/2006/relationships">
+  <p:cSld>
+    <p:spTree>
+      <p:nvGrpSpPr>
+        <p:cNvPr id="1" name=""/>
+        <p:cNvGrpSpPr/>
+        <p:nvPr/>
+      </p:nvGrpSpPr>
+      <p:grpSpPr/>
+      <p:sp>
+        <p:nvSpPr>
+          <p:cNvPr id="2" name="TextBox 1"/>
+          <p:cNvSpPr txBox="1"/>
+          <p:nvPr/>
+        </p:nvSpPr>
+        <p:spPr>
+          <a:xfrm>
+            <a:off x="457200" y="274320"/>
+            <a:ext cx="8229600" cy="640080"/>
+          </a:xfrm>
+          <a:prstGeom prst="rect">
+            <a:avLst/>
+          </a:prstGeom>
+          <a:noFill/>
+        </p:spPr>
+        <p:txBody>
+          <a:bodyPr wrap="square">
+            <a:spAutoFit/>
+          </a:bodyPr>
+          <a:lstStyle/>
+          <a:p>
+            <a:r>
+              <a:rPr sz="2200" b="1">
+                <a:solidFill>
+                  <a:srgbClr val="0B3D2E"/>
+                </a:solidFill>
+              </a:rPr>
+              <a:t>Diagrama de la clase</a:t>
+            </a:r>
+          </a:p>
+        </p:txBody>
+      </p:sp>
+      <p:pic>
+        <p:nvPicPr>
+          <p:cNvPr id="3" name="Picture 2" descr="eb3ceef3f8b56a43.png"/>
+          <p:cNvPicPr>
+            <a:picLocks noChangeAspect="1"/>
+          </p:cNvPicPr>
+          <p:nvPr/>
+        </p:nvPicPr>
+        <p:blipFill>
+          <a:blip r:embed="rId2"/>
+          <a:stretch>
+            <a:fillRect/>
+          </a:stretch>
+        </p:blipFill>
+        <p:spPr>
+          <a:xfrm>
+            <a:off x="457200" y="3415284"/>
+            <a:ext cx="8229600" cy="667512"/>
+          </a:xfrm>
+          <a:prstGeom prst="rect">
+            <a:avLst/>
+          </a:prstGeom>
+        </p:spPr>
+      </p:pic>
     </p:spTree>
   </p:cSld>
   <p:clrMapOvr>
@@ -3996,7 +4597,7 @@
                   <a:srgbClr val="22282E"/>
                 </a:solidFill>
               </a:rPr>
-              <a:t>•  1 — Ciclo NIST aplicado a la nube</a:t>
+              <a:t>•  1 — NIST SP 800-61 Rev. 3 aplicado a la nube</a:t>
             </a:r>
           </a:p>
           <a:p>
@@ -4137,7 +4738,7 @@
                   <a:srgbClr val="0B3D2E"/>
                 </a:solidFill>
               </a:rPr>
-              <a:t>📖 Definiciones y características</a:t>
+              <a:t>🧠 Explicación en profundidad</a:t>
             </a:r>
           </a:p>
         </p:txBody>
@@ -4175,97 +4776,97 @@
                   <a:srgbClr val="22282E"/>
                 </a:solidFill>
               </a:rPr>
-              <a:t>•  Playbook/runbook: procedimiento paso a paso para un tipo de incidente. Clave: reduce el tiempo de respuesta y errores bajo presión.</a:t>
-            </a:r>
-          </a:p>
-          <a:p>
-            <a:pPr>
-              <a:spcAft>
-                <a:spcPts val="600"/>
-              </a:spcAft>
-            </a:pPr>
-            <a:r>
-              <a:rPr sz="1500">
-                <a:solidFill>
-                  <a:srgbClr val="22282E"/>
-                </a:solidFill>
-              </a:rPr>
-              <a:t>•  Contención: limitar el alcance del incidente. Clave: en la nube suele empezar por IAM (revocar sesiones, deshabilitar claves).</a:t>
-            </a:r>
-          </a:p>
-          <a:p>
-            <a:pPr>
-              <a:spcAft>
-                <a:spcPts val="600"/>
-              </a:spcAft>
-            </a:pPr>
-            <a:r>
-              <a:rPr sz="1500">
-                <a:solidFill>
-                  <a:srgbClr val="22282E"/>
-                </a:solidFill>
-              </a:rPr>
-              <a:t>•  Aislamiento (cuarentena): apartar un recurso sin destruirlo. Clave: cambia security group a "sin tráfico" en vez de apagar, para conservar memoria.</a:t>
-            </a:r>
-          </a:p>
-          <a:p>
-            <a:pPr>
-              <a:spcAft>
-                <a:spcPts val="600"/>
-              </a:spcAft>
-            </a:pPr>
-            <a:r>
-              <a:rPr sz="1500">
-                <a:solidFill>
-                  <a:srgbClr val="22282E"/>
-                </a:solidFill>
-              </a:rPr>
-              <a:t>•  Snapshot forense: copia inmutable de un volumen/disco. Clave: evidencia sin alterar el original.</a:t>
-            </a:r>
-          </a:p>
-          <a:p>
-            <a:pPr>
-              <a:spcAft>
-                <a:spcPts val="600"/>
-              </a:spcAft>
-            </a:pPr>
-            <a:r>
-              <a:rPr sz="1500">
-                <a:solidFill>
-                  <a:srgbClr val="22282E"/>
-                </a:solidFill>
-              </a:rPr>
-              <a:t>•  Rotación de credenciales: invalidar y reemplazar secretos comprometidos. Clave: corta el acceso del atacante.</a:t>
-            </a:r>
-          </a:p>
-          <a:p>
-            <a:pPr>
-              <a:spcAft>
-                <a:spcPts val="600"/>
-              </a:spcAft>
-            </a:pPr>
-            <a:r>
-              <a:rPr sz="1500">
-                <a:solidFill>
-                  <a:srgbClr val="22282E"/>
-                </a:solidFill>
-              </a:rPr>
-              <a:t>•  Erradicación: eliminar la presencia del atacante (backdoors, usuarios, reglas). Clave: verifica que no queda persistencia.</a:t>
-            </a:r>
-          </a:p>
-          <a:p>
-            <a:pPr>
-              <a:spcAft>
-                <a:spcPts val="600"/>
-              </a:spcAft>
-            </a:pPr>
-            <a:r>
-              <a:rPr sz="1500">
-                <a:solidFill>
-                  <a:srgbClr val="22282E"/>
-                </a:solidFill>
-              </a:rPr>
-              <a:t>•  Recuperación con IaC: reconstruir desde código confiable. Clave: garantiza un estado limpio y auditable.</a:t>
+              <a:t>•  La respuesta cloud investiga un sistema que cambia mediante API y donde identidad puede tener más continuidad que una instancia. Preparación crea roles de emergencia, destinos de evidencia separados…</a:t>
+            </a:r>
+          </a:p>
+          <a:p>
+            <a:pPr>
+              <a:spcAft>
+                <a:spcPts val="600"/>
+              </a:spcAft>
+            </a:pPr>
+            <a:r>
+              <a:rPr sz="1500">
+                <a:solidFill>
+                  <a:srgbClr val="22282E"/>
+                </a:solidFill>
+              </a:rPr>
+              <a:t>•  El diagrama no apaga una instancia de inmediato. Primero identifica qué evidencia es volátil y qué daño continúa. Si hay cifrado o exfiltración activos, contener puede preceder a una adquisición…</a:t>
+            </a:r>
+          </a:p>
+          <a:p>
+            <a:pPr>
+              <a:spcAft>
+                <a:spcPts val="600"/>
+              </a:spcAft>
+            </a:pPr>
+            <a:r>
+              <a:rPr sz="1500">
+                <a:solidFill>
+                  <a:srgbClr val="22282E"/>
+                </a:solidFill>
+              </a:rPr>
+              <a:t>•  Deshabilitar una access key no revoca necesariamente sesiones ya emitidas, roles asumidos, tokens de federación, aplicaciones OAuth u otras credenciales creadas. Se reconstruye la cadena de identidad…</a:t>
+            </a:r>
+          </a:p>
+          <a:p>
+            <a:pPr>
+              <a:spcAft>
+                <a:spcPts val="600"/>
+              </a:spcAft>
+            </a:pPr>
+            <a:r>
+              <a:rPr sz="1500">
+                <a:solidFill>
+                  <a:srgbClr val="22282E"/>
+                </a:solidFill>
+              </a:rPr>
+              <a:t>•  Aislar una VM mediante SG de cuarentena reduce red, pero puede no detener acciones por instance role hacia APIs, tráfico por rutas no consideradas o servicios administrados. La cuarentena se prueba…</a:t>
+            </a:r>
+          </a:p>
+          <a:p>
+            <a:pPr>
+              <a:spcAft>
+                <a:spcPts val="600"/>
+              </a:spcAft>
+            </a:pPr>
+            <a:r>
+              <a:rPr sz="1500">
+                <a:solidFill>
+                  <a:srgbClr val="22282E"/>
+                </a:solidFill>
+              </a:rPr>
+              <a:t>•  Snapshots son copias administradas del volumen, no imágenes físicas ni memoria. Se conservan identificador, cuenta, región, hora, tags, comando/API, request ID, permisos y hash de exportaciones…</a:t>
+            </a:r>
+          </a:p>
+          <a:p>
+            <a:pPr>
+              <a:spcAft>
+                <a:spcPts val="600"/>
+              </a:spcAft>
+            </a:pPr>
+            <a:r>
+              <a:rPr sz="1500">
+                <a:solidFill>
+                  <a:srgbClr val="22282E"/>
+                </a:solidFill>
+              </a:rPr>
+              <a:t>•  Los logs pueden tener latencia, categorías deshabilitadas o vivir en otra cuenta. Se exportan respuestas originales con paginación y consultas. NISTIR 8006 ayuda a describir desafíos de acceso y…</a:t>
+            </a:r>
+          </a:p>
+          <a:p>
+            <a:pPr>
+              <a:spcAft>
+                <a:spcPts val="600"/>
+              </a:spcAft>
+            </a:pPr>
+            <a:r>
+              <a:rPr sz="1500">
+                <a:solidFill>
+                  <a:srgbClr val="22282E"/>
+                </a:solidFill>
+              </a:rPr>
+              <a:t>•  Erradicación incluye claves, sesiones, roles, trust policies, reglas, funciones, imágenes, pipeline y vector inicial. Recuperar con IaC reduce improvisación solo si el código, módulos, state…</a:t>
             </a:r>
           </a:p>
         </p:txBody>
@@ -4316,7 +4917,7 @@
                   <a:srgbClr val="0B3D2E"/>
                 </a:solidFill>
               </a:rPr>
-              <a:t>🧰 Herramientas y preparación</a:t>
+              <a:t>📖 Definiciones y características</a:t>
             </a:r>
           </a:p>
         </p:txBody>
@@ -4354,67 +4955,97 @@
                   <a:srgbClr val="22282E"/>
                 </a:solidFill>
               </a:rPr>
-              <a:t>•  Cuenta de laboratorio con logging ya configurado (clase 234) y CLIs del proveedor.</a:t>
-            </a:r>
-          </a:p>
-          <a:p>
-            <a:pPr>
-              <a:spcAft>
-                <a:spcPts val="600"/>
-              </a:spcAft>
-            </a:pPr>
-            <a:r>
-              <a:rPr sz="1500">
-                <a:solidFill>
-                  <a:srgbClr val="22282E"/>
-                </a:solidFill>
-              </a:rPr>
-              <a:t>•  Herramientas de forense cloud como AWS IR playbooks, snapshots de EBS/discos y Cloud Custodian para automatizar contención.</a:t>
-            </a:r>
-          </a:p>
-          <a:p>
-            <a:pPr>
-              <a:spcAft>
-                <a:spcPts val="600"/>
-              </a:spcAft>
-            </a:pPr>
-            <a:r>
-              <a:rPr sz="1500">
-                <a:solidFill>
-                  <a:srgbClr val="22282E"/>
-                </a:solidFill>
-              </a:rPr>
-              <a:t>•  Un repositorio Terraform (clase 230) para reconstrucción.</a:t>
-            </a:r>
-          </a:p>
-          <a:p>
-            <a:pPr>
-              <a:spcAft>
-                <a:spcPts val="600"/>
-              </a:spcAft>
-            </a:pPr>
-            <a:r>
-              <a:rPr sz="1500">
-                <a:solidFill>
-                  <a:srgbClr val="22282E"/>
-                </a:solidFill>
-              </a:rPr>
-              <a:t>•  aws iam update-access-key --access-key-id AKIA... --status Inactive</a:t>
-            </a:r>
-          </a:p>
-          <a:p>
-            <a:pPr>
-              <a:spcAft>
-                <a:spcPts val="600"/>
-              </a:spcAft>
-            </a:pPr>
-            <a:r>
-              <a:rPr sz="1500">
-                <a:solidFill>
-                  <a:srgbClr val="22282E"/>
-                </a:solidFill>
-              </a:rPr>
-              <a:t>•  aws ec2 create-snapshot --volume-id vol-0abc --description "IR-forense-caso-42"</a:t>
+              <a:t>•  Playbook/runbook: procedimiento paso a paso para un tipo de incidente. Clave: reduce el tiempo de respuesta y errores bajo presión.</a:t>
+            </a:r>
+          </a:p>
+          <a:p>
+            <a:pPr>
+              <a:spcAft>
+                <a:spcPts val="600"/>
+              </a:spcAft>
+            </a:pPr>
+            <a:r>
+              <a:rPr sz="1500">
+                <a:solidFill>
+                  <a:srgbClr val="22282E"/>
+                </a:solidFill>
+              </a:rPr>
+              <a:t>•  Contención: limitar el alcance del incidente. Clave: en la nube suele empezar por IAM (revocar sesiones, deshabilitar claves).</a:t>
+            </a:r>
+          </a:p>
+          <a:p>
+            <a:pPr>
+              <a:spcAft>
+                <a:spcPts val="600"/>
+              </a:spcAft>
+            </a:pPr>
+            <a:r>
+              <a:rPr sz="1500">
+                <a:solidFill>
+                  <a:srgbClr val="22282E"/>
+                </a:solidFill>
+              </a:rPr>
+              <a:t>•  Aislamiento (cuarentena): apartar un recurso sin destruirlo. Clave: cambia security group a "sin tráfico" en vez de apagar, para conservar memoria.</a:t>
+            </a:r>
+          </a:p>
+          <a:p>
+            <a:pPr>
+              <a:spcAft>
+                <a:spcPts val="600"/>
+              </a:spcAft>
+            </a:pPr>
+            <a:r>
+              <a:rPr sz="1500">
+                <a:solidFill>
+                  <a:srgbClr val="22282E"/>
+                </a:solidFill>
+              </a:rPr>
+              <a:t>•  Snapshot de investigación: copia puntual administrada por el proveedor. Clave: preserva el estado accesible del volumen, con consistencia y mutabilidad dependientes del servicio y controles.</a:t>
+            </a:r>
+          </a:p>
+          <a:p>
+            <a:pPr>
+              <a:spcAft>
+                <a:spcPts val="600"/>
+              </a:spcAft>
+            </a:pPr>
+            <a:r>
+              <a:rPr sz="1500">
+                <a:solidFill>
+                  <a:srgbClr val="22282E"/>
+                </a:solidFill>
+              </a:rPr>
+              <a:t>•  Rotación de credenciales: invalidar y reemplazar secretos comprometidos. Clave: corta el acceso del atacante.</a:t>
+            </a:r>
+          </a:p>
+          <a:p>
+            <a:pPr>
+              <a:spcAft>
+                <a:spcPts val="600"/>
+              </a:spcAft>
+            </a:pPr>
+            <a:r>
+              <a:rPr sz="1500">
+                <a:solidFill>
+                  <a:srgbClr val="22282E"/>
+                </a:solidFill>
+              </a:rPr>
+              <a:t>•  Erradicación: eliminar accesos, persistencia y condiciones explotadas dentro del alcance conocido. Clave: abarca identidad, recursos, automatización y dependencias.</a:t>
+            </a:r>
+          </a:p>
+          <a:p>
+            <a:pPr>
+              <a:spcAft>
+                <a:spcPts val="600"/>
+              </a:spcAft>
+            </a:pPr>
+            <a:r>
+              <a:rPr sz="1500">
+                <a:solidFill>
+                  <a:srgbClr val="22282E"/>
+                </a:solidFill>
+              </a:rPr>
+              <a:t>•  Recuperación con IaC: reconstruir desde código revisado y state controlado. Clave: mejora trazabilidad, pero necesita validación de código, módulos, imágenes, secretos y estado efectivo.</a:t>
             </a:r>
           </a:p>
         </p:txBody>
@@ -4465,7 +5096,7 @@
                   <a:srgbClr val="0B3D2E"/>
                 </a:solidFill>
               </a:rPr>
-              <a:t>🧪 Laboratorio guiado</a:t>
+              <a:t>🔍 Caso razonado — clave AWS rotada, sesión aún activa</a:t>
             </a:r>
           </a:p>
         </p:txBody>
@@ -4503,97 +5134,22 @@
                   <a:srgbClr val="22282E"/>
                 </a:solidFill>
               </a:rPr>
-              <a:t>•  Preparación: define un rol de "responder" con permisos mínimos para aislar y adquirir; crea el runbook y una cuenta/bucket de evidencia.</a:t>
-            </a:r>
-          </a:p>
-          <a:p>
-            <a:pPr>
-              <a:spcAft>
-                <a:spcPts val="600"/>
-              </a:spcAft>
-            </a:pPr>
-            <a:r>
-              <a:rPr sz="1500">
-                <a:solidFill>
-                  <a:srgbClr val="22282E"/>
-                </a:solidFill>
-              </a:rPr>
-              <a:t>•  Detección/análisis: parte de una alerta de la clase 234 (p. ej. creación anómala de clave de acceso). Reconstruye el "quién/qué/cuándo" con los logs del plano de gestión.</a:t>
-            </a:r>
-          </a:p>
-          <a:p>
-            <a:pPr>
-              <a:spcAft>
-                <a:spcPts val="600"/>
-              </a:spcAft>
-            </a:pPr>
-            <a:r>
-              <a:rPr sz="1500">
-                <a:solidFill>
-                  <a:srgbClr val="22282E"/>
-                </a:solidFill>
-              </a:rPr>
-              <a:t>•  Contención de identidad: deshabilita la clave comprometida, revoca las sesiones activas (invalidar tokens) y aplica una policy de deny explícito al principal afectado. No lo borres aún (evidencia).</a:t>
-            </a:r>
-          </a:p>
-          <a:p>
-            <a:pPr>
-              <a:spcAft>
-                <a:spcPts val="600"/>
-              </a:spcAft>
-            </a:pPr>
-            <a:r>
-              <a:rPr sz="1500">
-                <a:solidFill>
-                  <a:srgbClr val="22282E"/>
-                </a:solidFill>
-              </a:rPr>
-              <a:t>•  Aislamiento del recurso: para una instancia comprometida, cambia su security group a uno sin reglas (cuarentena) en lugar de apagarla, para preservar la memoria y las conexiones.</a:t>
-            </a:r>
-          </a:p>
-          <a:p>
-            <a:pPr>
-              <a:spcAft>
-                <a:spcPts val="600"/>
-              </a:spcAft>
-            </a:pPr>
-            <a:r>
-              <a:rPr sz="1500">
-                <a:solidFill>
-                  <a:srgbClr val="22282E"/>
-                </a:solidFill>
-              </a:rPr>
-              <a:t>•  Adquisición: crea un snapshot del volumen, exporta los logs relevantes y guarda metadatos (etiquetas, IAM, red) en el bucket de evidencia inmutable.</a:t>
-            </a:r>
-          </a:p>
-          <a:p>
-            <a:pPr>
-              <a:spcAft>
-                <a:spcPts val="600"/>
-              </a:spcAft>
-            </a:pPr>
-            <a:r>
-              <a:rPr sz="1500">
-                <a:solidFill>
-                  <a:srgbClr val="22282E"/>
-                </a:solidFill>
-              </a:rPr>
-              <a:t>•  Erradicación: identifica y elimina persistencia (usuarios/roles nuevos, claves, reglas, funciones backdoor). Verifica con los logs que no queda actividad del atacante.</a:t>
-            </a:r>
-          </a:p>
-          <a:p>
-            <a:pPr>
-              <a:spcAft>
-                <a:spcPts val="600"/>
-              </a:spcAft>
-            </a:pPr>
-            <a:r>
-              <a:rPr sz="1500">
-                <a:solidFill>
-                  <a:srgbClr val="22282E"/>
-                </a:solidFill>
-              </a:rPr>
-              <a:t>•  Recuperación: reconstruye los recursos afectados desde Terraform en un estado limpio; rota todos los secretos que pudieran estar comprometidos.</a:t>
+              <a:t>•  CloudTrail alerta por enumeración de secretos con una access key filtrada. El equipo desactiva la clave, pero descubre eventos posteriores de una sesión de rol que esa identidad asumió antes.…</a:t>
+            </a:r>
+          </a:p>
+          <a:p>
+            <a:pPr>
+              <a:spcAft>
+                <a:spcPts val="600"/>
+              </a:spcAft>
+            </a:pPr>
+            <a:r>
+              <a:rPr sz="1500">
+                <a:solidFill>
+                  <a:srgbClr val="22282E"/>
+                </a:solidFill>
+              </a:rPr>
+              <a:t>•  Una instancia usada para persistencia se pone en SG de cuarentena, se crea snapshot y se conserva su configuración. La recuperación despliega desde Terraform corregido con un rol nuevo y data events…</a:t>
             </a:r>
           </a:p>
         </p:txBody>
@@ -4644,7 +5200,7 @@
                   <a:srgbClr val="0B3D2E"/>
                 </a:solidFill>
               </a:rPr>
-              <a:t>✍️ Ejercicios</a:t>
+              <a:t>✅ Criterio de dominio</a:t>
             </a:r>
           </a:p>
         </p:txBody>
@@ -4682,82 +5238,7 @@
                   <a:srgbClr val="22282E"/>
                 </a:solidFill>
               </a:rPr>
-              <a:t>•  Escribe el runbook de "credencial IAM comprometida" con pasos y comandos.</a:t>
-            </a:r>
-          </a:p>
-          <a:p>
-            <a:pPr>
-              <a:spcAft>
-                <a:spcPts val="600"/>
-              </a:spcAft>
-            </a:pPr>
-            <a:r>
-              <a:rPr sz="1500">
-                <a:solidFill>
-                  <a:srgbClr val="22282E"/>
-                </a:solidFill>
-              </a:rPr>
-              <a:t>•  Diseña el procedimiento de cuarentena de una instancia sin destruir evidencia.</a:t>
-            </a:r>
-          </a:p>
-          <a:p>
-            <a:pPr>
-              <a:spcAft>
-                <a:spcPts val="600"/>
-              </a:spcAft>
-            </a:pPr>
-            <a:r>
-              <a:rPr sz="1500">
-                <a:solidFill>
-                  <a:srgbClr val="22282E"/>
-                </a:solidFill>
-              </a:rPr>
-              <a:t>•  Automatiza con Cloud Custodian el aislamiento de un recurso etiquetado como comprometido.</a:t>
-            </a:r>
-          </a:p>
-          <a:p>
-            <a:pPr>
-              <a:spcAft>
-                <a:spcPts val="600"/>
-              </a:spcAft>
-            </a:pPr>
-            <a:r>
-              <a:rPr sz="1500">
-                <a:solidFill>
-                  <a:srgbClr val="22282E"/>
-                </a:solidFill>
-              </a:rPr>
-              <a:t>•  Redacta el procedimiento de adquisición de snapshots y cadena de custodia.</a:t>
-            </a:r>
-          </a:p>
-          <a:p>
-            <a:pPr>
-              <a:spcAft>
-                <a:spcPts val="600"/>
-              </a:spcAft>
-            </a:pPr>
-            <a:r>
-              <a:rPr sz="1500">
-                <a:solidFill>
-                  <a:srgbClr val="22282E"/>
-                </a:solidFill>
-              </a:rPr>
-              <a:t>•  Reconstruye un recurso desde IaC y verifica el estado limpio.</a:t>
-            </a:r>
-          </a:p>
-          <a:p>
-            <a:pPr>
-              <a:spcAft>
-                <a:spcPts val="600"/>
-              </a:spcAft>
-            </a:pPr>
-            <a:r>
-              <a:rPr sz="1500">
-                <a:solidFill>
-                  <a:srgbClr val="22282E"/>
-                </a:solidFill>
-              </a:rPr>
-              <a:t>•  Convierte una lección aprendida en una regla de detección nueva.</a:t>
+              <a:t>•  Dominas la clase cuando coordinas contención de identidad y recurso, preservas evidencia con límites del proveedor, amplías erradicación a IaC y automatización, y cierras mediante pruebas de…</a:t>
             </a:r>
           </a:p>
         </p:txBody>
@@ -4808,7 +5289,7 @@
                   <a:srgbClr val="0B3D2E"/>
                 </a:solidFill>
               </a:rPr>
-              <a:t>📝 Reto verificable</a:t>
+              <a:t>🧰 Herramientas y preparación</a:t>
             </a:r>
           </a:p>
         </p:txBody>
@@ -4846,82 +5327,37 @@
                   <a:srgbClr val="22282E"/>
                 </a:solidFill>
               </a:rPr>
-              <a:t>•  Ejecuta un playbook completo end-to-end para una credencial comprometida que lanzó una instancia</a:t>
-            </a:r>
-          </a:p>
-          <a:p>
-            <a:pPr>
-              <a:spcAft>
-                <a:spcPts val="600"/>
-              </a:spcAft>
-            </a:pPr>
-            <a:r>
-              <a:rPr sz="1500">
-                <a:solidFill>
-                  <a:srgbClr val="22282E"/>
-                </a:solidFill>
-              </a:rPr>
-              <a:t>•  maliciosa: detección, contención, aislamiento, adquisición, erradicación y recuperación con IaC.</a:t>
-            </a:r>
-          </a:p>
-          <a:p>
-            <a:pPr>
-              <a:spcAft>
-                <a:spcPts val="600"/>
-              </a:spcAft>
-            </a:pPr>
-            <a:r>
-              <a:rPr sz="1500">
-                <a:solidFill>
-                  <a:srgbClr val="22282E"/>
-                </a:solidFill>
-              </a:rPr>
-              <a:t>•  Criterio de aceptación: al final, la clave comprometida está deshabilitada y sus sesiones</a:t>
-            </a:r>
-          </a:p>
-          <a:p>
-            <a:pPr>
-              <a:spcAft>
-                <a:spcPts val="600"/>
-              </a:spcAft>
-            </a:pPr>
-            <a:r>
-              <a:rPr sz="1500">
-                <a:solidFill>
-                  <a:srgbClr val="22282E"/>
-                </a:solidFill>
-              </a:rPr>
-              <a:t>•  revocadas, existe un snapshot forense y evidencia preservada en almacén inmutable, no queda</a:t>
-            </a:r>
-          </a:p>
-          <a:p>
-            <a:pPr>
-              <a:spcAft>
-                <a:spcPts val="600"/>
-              </a:spcAft>
-            </a:pPr>
-            <a:r>
-              <a:rPr sz="1500">
-                <a:solidFill>
-                  <a:srgbClr val="22282E"/>
-                </a:solidFill>
-              </a:rPr>
-              <a:t>•  persistencia del atacante (verificado en logs), y el recurso afectado está reconstruido desde</a:t>
-            </a:r>
-          </a:p>
-          <a:p>
-            <a:pPr>
-              <a:spcAft>
-                <a:spcPts val="600"/>
-              </a:spcAft>
-            </a:pPr>
-            <a:r>
-              <a:rPr sz="1500">
-                <a:solidFill>
-                  <a:srgbClr val="22282E"/>
-                </a:solidFill>
-              </a:rPr>
-              <a:t>•  Terraform con secretos rotados. Todo queda documentado en un informe con línea de tiempo.</a:t>
+              <a:t>•  Cuenta de laboratorio con logging ya configurado (clase 234) y CLIs del proveedor.</a:t>
+            </a:r>
+          </a:p>
+          <a:p>
+            <a:pPr>
+              <a:spcAft>
+                <a:spcPts val="600"/>
+              </a:spcAft>
+            </a:pPr>
+            <a:r>
+              <a:rPr sz="1500">
+                <a:solidFill>
+                  <a:srgbClr val="22282E"/>
+                </a:solidFill>
+              </a:rPr>
+              <a:t>•  Herramientas de forense cloud como AWS IR playbooks, snapshots de EBS/discos y Cloud Custodian para automatizar contención.</a:t>
+            </a:r>
+          </a:p>
+          <a:p>
+            <a:pPr>
+              <a:spcAft>
+                <a:spcPts val="600"/>
+              </a:spcAft>
+            </a:pPr>
+            <a:r>
+              <a:rPr sz="1500">
+                <a:solidFill>
+                  <a:srgbClr val="22282E"/>
+                </a:solidFill>
+              </a:rPr>
+              <a:t>•  Un repositorio Terraform (clase 230) para reconstrucción.</a:t>
             </a:r>
           </a:p>
         </p:txBody>
